--- a/github_render.pptx
+++ b/github_render.pptx
@@ -5,18 +5,17 @@
     <p:sldMasterId id="2147483648" r:id="rId1"/>
   </p:sldMasterIdLst>
   <p:sldIdLst>
-    <p:sldId id="256" r:id="rId2"/>
-    <p:sldId id="257" r:id="rId3"/>
-    <p:sldId id="258" r:id="rId4"/>
-    <p:sldId id="259" r:id="rId5"/>
-    <p:sldId id="260" r:id="rId6"/>
-    <p:sldId id="261" r:id="rId7"/>
+    <p:sldId id="257" r:id="rId2"/>
+    <p:sldId id="258" r:id="rId3"/>
+    <p:sldId id="259" r:id="rId4"/>
+    <p:sldId id="260" r:id="rId5"/>
+    <p:sldId id="261" r:id="rId6"/>
   </p:sldIdLst>
   <p:sldSz cx="12192000" cy="6858000"/>
   <p:notesSz cx="6858000" cy="9144000"/>
   <p:photoAlbum/>
   <p:custDataLst>
-    <p:tags r:id="rId8"/>
+    <p:tags r:id="rId7"/>
   </p:custDataLst>
   <p:defaultTextStyle>
     <a:defPPr>
@@ -113,6 +112,11 @@
       </a:defRPr>
     </a:lvl9pPr>
   </p:defaultTextStyle>
+  <p:extLst>
+    <p:ext uri="{EFAFB233-063F-42B5-8137-9DF3F51BA10A}">
+      <p15:sldGuideLst xmlns:p15="http://schemas.microsoft.com/office/powerpoint/2012/main"/>
+    </p:ext>
+  </p:extLst>
 </p:presentation>
 </file>
 
@@ -265,7 +269,7 @@
           <a:p>
             <a:fld id="{5153D873-9674-4972-AA86-D1744EEB5147}" type="datetimeFigureOut">
               <a:rPr lang="en-AE" smtClean="0"/>
-              <a:t>26/09/2025</a:t>
+              <a:t>21/10/2025</a:t>
             </a:fld>
             <a:endParaRPr lang="en-AE"/>
           </a:p>
@@ -465,7 +469,7 @@
           <a:p>
             <a:fld id="{5153D873-9674-4972-AA86-D1744EEB5147}" type="datetimeFigureOut">
               <a:rPr lang="en-AE" smtClean="0"/>
-              <a:t>26/09/2025</a:t>
+              <a:t>21/10/2025</a:t>
             </a:fld>
             <a:endParaRPr lang="en-AE"/>
           </a:p>
@@ -675,7 +679,7 @@
           <a:p>
             <a:fld id="{5153D873-9674-4972-AA86-D1744EEB5147}" type="datetimeFigureOut">
               <a:rPr lang="en-AE" smtClean="0"/>
-              <a:t>26/09/2025</a:t>
+              <a:t>21/10/2025</a:t>
             </a:fld>
             <a:endParaRPr lang="en-AE"/>
           </a:p>
@@ -875,7 +879,7 @@
           <a:p>
             <a:fld id="{5153D873-9674-4972-AA86-D1744EEB5147}" type="datetimeFigureOut">
               <a:rPr lang="en-AE" smtClean="0"/>
-              <a:t>26/09/2025</a:t>
+              <a:t>21/10/2025</a:t>
             </a:fld>
             <a:endParaRPr lang="en-AE"/>
           </a:p>
@@ -1151,7 +1155,7 @@
           <a:p>
             <a:fld id="{5153D873-9674-4972-AA86-D1744EEB5147}" type="datetimeFigureOut">
               <a:rPr lang="en-AE" smtClean="0"/>
-              <a:t>26/09/2025</a:t>
+              <a:t>21/10/2025</a:t>
             </a:fld>
             <a:endParaRPr lang="en-AE"/>
           </a:p>
@@ -1419,7 +1423,7 @@
           <a:p>
             <a:fld id="{5153D873-9674-4972-AA86-D1744EEB5147}" type="datetimeFigureOut">
               <a:rPr lang="en-AE" smtClean="0"/>
-              <a:t>26/09/2025</a:t>
+              <a:t>21/10/2025</a:t>
             </a:fld>
             <a:endParaRPr lang="en-AE"/>
           </a:p>
@@ -1834,7 +1838,7 @@
           <a:p>
             <a:fld id="{5153D873-9674-4972-AA86-D1744EEB5147}" type="datetimeFigureOut">
               <a:rPr lang="en-AE" smtClean="0"/>
-              <a:t>26/09/2025</a:t>
+              <a:t>21/10/2025</a:t>
             </a:fld>
             <a:endParaRPr lang="en-AE"/>
           </a:p>
@@ -1976,7 +1980,7 @@
           <a:p>
             <a:fld id="{5153D873-9674-4972-AA86-D1744EEB5147}" type="datetimeFigureOut">
               <a:rPr lang="en-AE" smtClean="0"/>
-              <a:t>26/09/2025</a:t>
+              <a:t>21/10/2025</a:t>
             </a:fld>
             <a:endParaRPr lang="en-AE"/>
           </a:p>
@@ -2089,7 +2093,7 @@
           <a:p>
             <a:fld id="{5153D873-9674-4972-AA86-D1744EEB5147}" type="datetimeFigureOut">
               <a:rPr lang="en-AE" smtClean="0"/>
-              <a:t>26/09/2025</a:t>
+              <a:t>21/10/2025</a:t>
             </a:fld>
             <a:endParaRPr lang="en-AE"/>
           </a:p>
@@ -2402,7 +2406,7 @@
           <a:p>
             <a:fld id="{5153D873-9674-4972-AA86-D1744EEB5147}" type="datetimeFigureOut">
               <a:rPr lang="en-AE" smtClean="0"/>
-              <a:t>26/09/2025</a:t>
+              <a:t>21/10/2025</a:t>
             </a:fld>
             <a:endParaRPr lang="en-AE"/>
           </a:p>
@@ -2691,7 +2695,7 @@
           <a:p>
             <a:fld id="{5153D873-9674-4972-AA86-D1744EEB5147}" type="datetimeFigureOut">
               <a:rPr lang="en-AE" smtClean="0"/>
-              <a:t>26/09/2025</a:t>
+              <a:t>21/10/2025</a:t>
             </a:fld>
             <a:endParaRPr lang="en-AE"/>
           </a:p>
@@ -2934,7 +2938,7 @@
           <a:p>
             <a:fld id="{5153D873-9674-4972-AA86-D1744EEB5147}" type="datetimeFigureOut">
               <a:rPr lang="en-AE" smtClean="0"/>
-              <a:t>26/09/2025</a:t>
+              <a:t>21/10/2025</a:t>
             </a:fld>
             <a:endParaRPr lang="en-AE"/>
           </a:p>
@@ -3351,68 +3355,48 @@
           <a:chExt cx="0" cy="0"/>
         </a:xfrm>
       </p:grpSpPr>
-      <p:sp>
-        <p:nvSpPr>
-          <p:cNvPr id="2" name="Title 1">
-            <a:extLst>
-              <a:ext uri="{FF2B5EF4-FFF2-40B4-BE49-F238E27FC236}">
-                <a16:creationId xmlns:a16="http://schemas.microsoft.com/office/drawing/2014/main" id="{F8BD06FD-BCBB-3029-9378-782BEAF7ACC4}"/>
-              </a:ext>
-            </a:extLst>
-          </p:cNvPr>
-          <p:cNvSpPr>
-            <a:spLocks noGrp="1"/>
-          </p:cNvSpPr>
-          <p:nvPr>
-            <p:ph type="ctrTitle"/>
-          </p:nvPr>
-        </p:nvSpPr>
-        <p:spPr/>
-        <p:txBody>
-          <a:bodyPr/>
-          <a:lstStyle/>
-          <a:p>
-            <a:r>
-              <a:rPr lang="en-US"/>
-              <a:t>Photo Album</a:t>
-            </a:r>
-            <a:endParaRPr lang="en-AE"/>
-          </a:p>
-        </p:txBody>
-      </p:sp>
-      <p:sp>
-        <p:nvSpPr>
-          <p:cNvPr id="3" name="Subtitle 2">
-            <a:extLst>
-              <a:ext uri="{FF2B5EF4-FFF2-40B4-BE49-F238E27FC236}">
-                <a16:creationId xmlns:a16="http://schemas.microsoft.com/office/drawing/2014/main" id="{B2F65C67-CE9D-E77F-5E09-5FFDFD40A736}"/>
-              </a:ext>
-            </a:extLst>
-          </p:cNvPr>
-          <p:cNvSpPr>
-            <a:spLocks noGrp="1"/>
-          </p:cNvSpPr>
-          <p:nvPr>
-            <p:ph type="subTitle" idx="1"/>
-          </p:nvPr>
-        </p:nvSpPr>
-        <p:spPr/>
-        <p:txBody>
-          <a:bodyPr/>
-          <a:lstStyle/>
-          <a:p>
-            <a:r>
-              <a:rPr lang="en-US"/>
-              <a:t>by Fadi Yaqoub Saeed Alzaza</a:t>
-            </a:r>
-            <a:endParaRPr lang="en-AE"/>
-          </a:p>
-        </p:txBody>
-      </p:sp>
+      <p:pic>
+        <p:nvPicPr>
+          <p:cNvPr id="3" name="Picture 2" descr="387">
+            <a:extLst>
+              <a:ext uri="{FF2B5EF4-FFF2-40B4-BE49-F238E27FC236}">
+                <a16:creationId xmlns:a16="http://schemas.microsoft.com/office/drawing/2014/main" id="{F8DFE8D2-30F7-FE58-84F0-8140F757D298}"/>
+              </a:ext>
+            </a:extLst>
+          </p:cNvPr>
+          <p:cNvPicPr>
+            <a:picLocks noGrp="1" noChangeAspect="1"/>
+          </p:cNvPicPr>
+          <p:nvPr isPhoto="1"/>
+        </p:nvPicPr>
+        <p:blipFill>
+          <a:blip r:embed="rId2">
+            <a:lum/>
+            <a:extLst>
+              <a:ext uri="{28A0092B-C50C-407E-A947-70E740481C1C}">
+                <a14:useLocalDpi xmlns:a14="http://schemas.microsoft.com/office/drawing/2010/main" val="0"/>
+              </a:ext>
+            </a:extLst>
+          </a:blip>
+          <a:srcRect r="43250" b="-956"/>
+          <a:stretch>
+            <a:fillRect/>
+          </a:stretch>
+        </p:blipFill>
+        <p:spPr>
+          <a:xfrm>
+            <a:off x="0" y="81597"/>
+            <a:ext cx="11887200" cy="6798373"/>
+          </a:xfrm>
+          <a:prstGeom prst="rect">
+            <a:avLst/>
+          </a:prstGeom>
+        </p:spPr>
+      </p:pic>
     </p:spTree>
     <p:extLst>
       <p:ext uri="{BB962C8B-B14F-4D97-AF65-F5344CB8AC3E}">
-        <p14:creationId xmlns:p14="http://schemas.microsoft.com/office/powerpoint/2010/main" val="1447316885"/>
+        <p14:creationId xmlns:p14="http://schemas.microsoft.com/office/powerpoint/2010/main" val="522011413"/>
       </p:ext>
     </p:extLst>
   </p:cSld>
@@ -3441,10 +3425,10 @@
       </p:grpSpPr>
       <p:pic>
         <p:nvPicPr>
-          <p:cNvPr id="3" name="Picture 2" descr="387">
-            <a:extLst>
-              <a:ext uri="{FF2B5EF4-FFF2-40B4-BE49-F238E27FC236}">
-                <a16:creationId xmlns:a16="http://schemas.microsoft.com/office/drawing/2014/main" id="{F8DFE8D2-30F7-FE58-84F0-8140F757D298}"/>
+          <p:cNvPr id="3" name="Picture 2" descr="388">
+            <a:extLst>
+              <a:ext uri="{FF2B5EF4-FFF2-40B4-BE49-F238E27FC236}">
+                <a16:creationId xmlns:a16="http://schemas.microsoft.com/office/drawing/2014/main" id="{66EDBB95-C9D4-3C81-898B-E605842ADE9B}"/>
               </a:ext>
             </a:extLst>
           </p:cNvPr>
@@ -3462,14 +3446,15 @@
               </a:ext>
             </a:extLst>
           </a:blip>
+          <a:srcRect r="42813" b="-178"/>
           <a:stretch>
             <a:fillRect/>
           </a:stretch>
         </p:blipFill>
         <p:spPr>
           <a:xfrm>
-            <a:off x="0" y="1468438"/>
-            <a:ext cx="12192000" cy="3919537"/>
+            <a:off x="0" y="0"/>
+            <a:ext cx="11955780" cy="6733020"/>
           </a:xfrm>
           <a:prstGeom prst="rect">
             <a:avLst/>
@@ -3479,7 +3464,7 @@
     </p:spTree>
     <p:extLst>
       <p:ext uri="{BB962C8B-B14F-4D97-AF65-F5344CB8AC3E}">
-        <p14:creationId xmlns:p14="http://schemas.microsoft.com/office/powerpoint/2010/main" val="522011413"/>
+        <p14:creationId xmlns:p14="http://schemas.microsoft.com/office/powerpoint/2010/main" val="3737626698"/>
       </p:ext>
     </p:extLst>
   </p:cSld>
@@ -3508,10 +3493,10 @@
       </p:grpSpPr>
       <p:pic>
         <p:nvPicPr>
-          <p:cNvPr id="3" name="Picture 2" descr="388">
-            <a:extLst>
-              <a:ext uri="{FF2B5EF4-FFF2-40B4-BE49-F238E27FC236}">
-                <a16:creationId xmlns:a16="http://schemas.microsoft.com/office/drawing/2014/main" id="{66EDBB95-C9D4-3C81-898B-E605842ADE9B}"/>
+          <p:cNvPr id="3" name="Picture 2" descr="389">
+            <a:extLst>
+              <a:ext uri="{FF2B5EF4-FFF2-40B4-BE49-F238E27FC236}">
+                <a16:creationId xmlns:a16="http://schemas.microsoft.com/office/drawing/2014/main" id="{BEDCC2E8-3EBC-BCA6-2FDD-B3BF6F49E2F9}"/>
               </a:ext>
             </a:extLst>
           </p:cNvPr>
@@ -3529,14 +3514,15 @@
               </a:ext>
             </a:extLst>
           </a:blip>
+          <a:srcRect l="-687" t="17497" r="42937" b="-17870"/>
           <a:stretch>
             <a:fillRect/>
           </a:stretch>
         </p:blipFill>
         <p:spPr>
           <a:xfrm>
-            <a:off x="0" y="1468438"/>
-            <a:ext cx="12192000" cy="3919537"/>
+            <a:off x="0" y="142557"/>
+            <a:ext cx="12192000" cy="6812367"/>
           </a:xfrm>
           <a:prstGeom prst="rect">
             <a:avLst/>
@@ -3546,7 +3532,7 @@
     </p:spTree>
     <p:extLst>
       <p:ext uri="{BB962C8B-B14F-4D97-AF65-F5344CB8AC3E}">
-        <p14:creationId xmlns:p14="http://schemas.microsoft.com/office/powerpoint/2010/main" val="3737626698"/>
+        <p14:creationId xmlns:p14="http://schemas.microsoft.com/office/powerpoint/2010/main" val="4281896026"/>
       </p:ext>
     </p:extLst>
   </p:cSld>
@@ -3575,10 +3561,10 @@
       </p:grpSpPr>
       <p:pic>
         <p:nvPicPr>
-          <p:cNvPr id="3" name="Picture 2" descr="389">
-            <a:extLst>
-              <a:ext uri="{FF2B5EF4-FFF2-40B4-BE49-F238E27FC236}">
-                <a16:creationId xmlns:a16="http://schemas.microsoft.com/office/drawing/2014/main" id="{BEDCC2E8-3EBC-BCA6-2FDD-B3BF6F49E2F9}"/>
+          <p:cNvPr id="3" name="Picture 2" descr="390">
+            <a:extLst>
+              <a:ext uri="{FF2B5EF4-FFF2-40B4-BE49-F238E27FC236}">
+                <a16:creationId xmlns:a16="http://schemas.microsoft.com/office/drawing/2014/main" id="{1EFA972E-7CFC-924D-A06C-3535E31C3A71}"/>
               </a:ext>
             </a:extLst>
           </p:cNvPr>
@@ -3596,14 +3582,15 @@
               </a:ext>
             </a:extLst>
           </a:blip>
+          <a:srcRect t="1" r="42688" b="-1151"/>
           <a:stretch>
             <a:fillRect/>
           </a:stretch>
         </p:blipFill>
         <p:spPr>
           <a:xfrm>
-            <a:off x="0" y="1468438"/>
-            <a:ext cx="12192000" cy="3919537"/>
+            <a:off x="0" y="-1"/>
+            <a:ext cx="11917680" cy="6761907"/>
           </a:xfrm>
           <a:prstGeom prst="rect">
             <a:avLst/>
@@ -3613,7 +3600,7 @@
     </p:spTree>
     <p:extLst>
       <p:ext uri="{BB962C8B-B14F-4D97-AF65-F5344CB8AC3E}">
-        <p14:creationId xmlns:p14="http://schemas.microsoft.com/office/powerpoint/2010/main" val="4281896026"/>
+        <p14:creationId xmlns:p14="http://schemas.microsoft.com/office/powerpoint/2010/main" val="4144573530"/>
       </p:ext>
     </p:extLst>
   </p:cSld>
@@ -3642,10 +3629,10 @@
       </p:grpSpPr>
       <p:pic>
         <p:nvPicPr>
-          <p:cNvPr id="3" name="Picture 2" descr="390">
-            <a:extLst>
-              <a:ext uri="{FF2B5EF4-FFF2-40B4-BE49-F238E27FC236}">
-                <a16:creationId xmlns:a16="http://schemas.microsoft.com/office/drawing/2014/main" id="{1EFA972E-7CFC-924D-A06C-3535E31C3A71}"/>
+          <p:cNvPr id="3" name="Picture 2" descr="391">
+            <a:extLst>
+              <a:ext uri="{FF2B5EF4-FFF2-40B4-BE49-F238E27FC236}">
+                <a16:creationId xmlns:a16="http://schemas.microsoft.com/office/drawing/2014/main" id="{67413086-32AA-9A75-89C3-ADE68530E9AF}"/>
               </a:ext>
             </a:extLst>
           </p:cNvPr>
@@ -3663,81 +3650,15 @@
               </a:ext>
             </a:extLst>
           </a:blip>
+          <a:srcRect t="-1" r="42500" b="-1344"/>
           <a:stretch>
             <a:fillRect/>
           </a:stretch>
         </p:blipFill>
         <p:spPr>
           <a:xfrm>
-            <a:off x="0" y="1468438"/>
-            <a:ext cx="12192000" cy="3919537"/>
-          </a:xfrm>
-          <a:prstGeom prst="rect">
-            <a:avLst/>
-          </a:prstGeom>
-        </p:spPr>
-      </p:pic>
-    </p:spTree>
-    <p:extLst>
-      <p:ext uri="{BB962C8B-B14F-4D97-AF65-F5344CB8AC3E}">
-        <p14:creationId xmlns:p14="http://schemas.microsoft.com/office/powerpoint/2010/main" val="4144573530"/>
-      </p:ext>
-    </p:extLst>
-  </p:cSld>
-  <p:clrMapOvr>
-    <a:masterClrMapping/>
-  </p:clrMapOvr>
-</p:sld>
-</file>
-
-<file path=ppt/slides/slide6.xml><?xml version="1.0" encoding="utf-8"?>
-<p:sld xmlns:a="http://schemas.openxmlformats.org/drawingml/2006/main" xmlns:r="http://schemas.openxmlformats.org/officeDocument/2006/relationships" xmlns:p="http://schemas.openxmlformats.org/presentationml/2006/main">
-  <p:cSld>
-    <p:spTree>
-      <p:nvGrpSpPr>
-        <p:cNvPr id="1" name=""/>
-        <p:cNvGrpSpPr/>
-        <p:nvPr/>
-      </p:nvGrpSpPr>
-      <p:grpSpPr>
-        <a:xfrm>
-          <a:off x="0" y="0"/>
-          <a:ext cx="0" cy="0"/>
-          <a:chOff x="0" y="0"/>
-          <a:chExt cx="0" cy="0"/>
-        </a:xfrm>
-      </p:grpSpPr>
-      <p:pic>
-        <p:nvPicPr>
-          <p:cNvPr id="3" name="Picture 2" descr="391">
-            <a:extLst>
-              <a:ext uri="{FF2B5EF4-FFF2-40B4-BE49-F238E27FC236}">
-                <a16:creationId xmlns:a16="http://schemas.microsoft.com/office/drawing/2014/main" id="{67413086-32AA-9A75-89C3-ADE68530E9AF}"/>
-              </a:ext>
-            </a:extLst>
-          </p:cNvPr>
-          <p:cNvPicPr>
-            <a:picLocks noGrp="1" noChangeAspect="1"/>
-          </p:cNvPicPr>
-          <p:nvPr isPhoto="1"/>
-        </p:nvPicPr>
-        <p:blipFill>
-          <a:blip r:embed="rId2">
-            <a:lum/>
-            <a:extLst>
-              <a:ext uri="{28A0092B-C50C-407E-A947-70E740481C1C}">
-                <a14:useLocalDpi xmlns:a14="http://schemas.microsoft.com/office/drawing/2010/main" val="0"/>
-              </a:ext>
-            </a:extLst>
-          </a:blip>
-          <a:stretch>
-            <a:fillRect/>
-          </a:stretch>
-        </p:blipFill>
-        <p:spPr>
-          <a:xfrm>
-            <a:off x="0" y="1468438"/>
-            <a:ext cx="12192000" cy="3919537"/>
+            <a:off x="60960" y="0"/>
+            <a:ext cx="12131040" cy="6873706"/>
           </a:xfrm>
           <a:prstGeom prst="rect">
             <a:avLst/>
